--- a/CNC-Plasma/assets/downloads/module-04-classroom.pptx
+++ b/CNC-Plasma/assets/downloads/module-04-classroom.pptx
@@ -2,20 +2,20 @@
 <file path=ppt/presentation.xml><?xml version="1.0" encoding="utf-8"?>
 <p:presentation xmlns:p="http://schemas.openxmlformats.org/presentationml/2006/main">
   <p:sldMasterIdLst>
-    <p:sldMasterId xmlns:r="http://schemas.openxmlformats.org/officeDocument/2006/relationships" id="2147483648" r:id="Reda74f65c837488b"/>
+    <p:sldMasterId xmlns:r="http://schemas.openxmlformats.org/officeDocument/2006/relationships" id="2147483648" r:id="R83950299a0cd4484"/>
   </p:sldMasterIdLst>
   <p:notesMasterIdLst>
-    <p:notesMasterId xmlns:r="http://schemas.openxmlformats.org/officeDocument/2006/relationships" r:id="R6281b1703db84029"/>
+    <p:notesMasterId xmlns:r="http://schemas.openxmlformats.org/officeDocument/2006/relationships" r:id="R0a5dd22a9d094d8d"/>
   </p:notesMasterIdLst>
   <p:sldIdLst>
-    <p:sldId xmlns:r="http://schemas.openxmlformats.org/officeDocument/2006/relationships" id="256" r:id="R69fe6322215a427f"/>
-    <p:sldId xmlns:r="http://schemas.openxmlformats.org/officeDocument/2006/relationships" id="257" r:id="R915e9a808e954162"/>
-    <p:sldId xmlns:r="http://schemas.openxmlformats.org/officeDocument/2006/relationships" id="258" r:id="R2c516f7c9cf340b8"/>
-    <p:sldId xmlns:r="http://schemas.openxmlformats.org/officeDocument/2006/relationships" id="259" r:id="Rb61acb4bdaa34633"/>
-    <p:sldId xmlns:r="http://schemas.openxmlformats.org/officeDocument/2006/relationships" id="260" r:id="R18e1c3ac1f834a40"/>
-    <p:sldId xmlns:r="http://schemas.openxmlformats.org/officeDocument/2006/relationships" id="261" r:id="Rc6a5c10c84e846f7"/>
-    <p:sldId xmlns:r="http://schemas.openxmlformats.org/officeDocument/2006/relationships" id="262" r:id="R0b2c39d5a3d546d3"/>
-    <p:sldId xmlns:r="http://schemas.openxmlformats.org/officeDocument/2006/relationships" id="263" r:id="R219727abc1764701"/>
+    <p:sldId xmlns:r="http://schemas.openxmlformats.org/officeDocument/2006/relationships" id="256" r:id="Rb63e91b73a004485"/>
+    <p:sldId xmlns:r="http://schemas.openxmlformats.org/officeDocument/2006/relationships" id="257" r:id="Rf2a3ce7f1fd04ab3"/>
+    <p:sldId xmlns:r="http://schemas.openxmlformats.org/officeDocument/2006/relationships" id="258" r:id="Rc1d70f93d3d94f11"/>
+    <p:sldId xmlns:r="http://schemas.openxmlformats.org/officeDocument/2006/relationships" id="259" r:id="Ra9156849d35d40dc"/>
+    <p:sldId xmlns:r="http://schemas.openxmlformats.org/officeDocument/2006/relationships" id="260" r:id="R497f5dc7831a46f2"/>
+    <p:sldId xmlns:r="http://schemas.openxmlformats.org/officeDocument/2006/relationships" id="261" r:id="Rec0f95a1b6e8418a"/>
+    <p:sldId xmlns:r="http://schemas.openxmlformats.org/officeDocument/2006/relationships" id="262" r:id="R0a6e185166e54c55"/>
+    <p:sldId xmlns:r="http://schemas.openxmlformats.org/officeDocument/2006/relationships" id="263" r:id="R281653e4d11b4ab7"/>
   </p:sldIdLst>
   <p:sldSz cx="12192000" cy="6858000"/>
   <p:notesSz cx="6858000" cy="9144000"/>
@@ -472,6 +472,26 @@
               <a:t>Source: Surecontrol Software Manual_Draft4.pdf</a:t>
             </a:r>
           </a:p>
+          <a:p xmlns:a="http://schemas.openxmlformats.org/drawingml/2006/main">
+            <a:r>
+              <a:t/>
+            </a:r>
+          </a:p>
+          <a:p xmlns:a="http://schemas.openxmlformats.org/drawingml/2006/main">
+            <a:r>
+              <a:t/>
+            </a:r>
+          </a:p>
+          <a:p xmlns:a="http://schemas.openxmlformats.org/drawingml/2006/main">
+            <a:r>
+              <a:t>ILLUSTRATIVE IMAGE</a:t>
+            </a:r>
+          </a:p>
+          <a:p xmlns:a="http://schemas.openxmlformats.org/drawingml/2006/main">
+            <a:r>
+              <a:t>AI-generated concept illustration for Understand teacher-controlled production. This illustration supports discussion and is not a photograph of the school installation, a software screenshot, or a machine-setting guide. Original source reference images remain on this slide where present.</a:t>
+            </a:r>
+          </a:p>
         </p:txBody>
       </p:sp>
       <p:sp>
@@ -557,6 +577,26 @@
               <a:t>m04-s03: Explain how a class can learn from a teacher-controlled demonstration when the offline preview is correct but the physical dry run fails the fit check. Justify the pause, the student role and the conditions that still apply before any later cut or retrieval.</a:t>
             </a:r>
           </a:p>
+          <a:p xmlns:a="http://schemas.openxmlformats.org/drawingml/2006/main">
+            <a:r>
+              <a:t/>
+            </a:r>
+          </a:p>
+          <a:p xmlns:a="http://schemas.openxmlformats.org/drawingml/2006/main">
+            <a:r>
+              <a:t/>
+            </a:r>
+          </a:p>
+          <a:p xmlns:a="http://schemas.openxmlformats.org/drawingml/2006/main">
+            <a:r>
+              <a:t>ILLUSTRATIVE IMAGE</a:t>
+            </a:r>
+          </a:p>
+          <a:p xmlns:a="http://schemas.openxmlformats.org/drawingml/2006/main">
+            <a:r>
+              <a:t>AI-generated concept illustration for Today’s learning map. This illustration supports discussion and is not a photograph of the school installation, a software screenshot, or a machine-setting guide. Original source reference images remain on this slide where present.</a:t>
+            </a:r>
+          </a:p>
         </p:txBody>
       </p:sp>
       <p:sp>
@@ -727,6 +767,26 @@
               <a:t>Use the section’s ten questions for individual retrieval and feedback. Do not infer practical competence from online completion.</a:t>
             </a:r>
           </a:p>
+          <a:p xmlns:a="http://schemas.openxmlformats.org/drawingml/2006/main">
+            <a:r>
+              <a:t/>
+            </a:r>
+          </a:p>
+          <a:p xmlns:a="http://schemas.openxmlformats.org/drawingml/2006/main">
+            <a:r>
+              <a:t/>
+            </a:r>
+          </a:p>
+          <a:p xmlns:a="http://schemas.openxmlformats.org/drawingml/2006/main">
+            <a:r>
+              <a:t>ILLUSTRATIVE IMAGE</a:t>
+            </a:r>
+          </a:p>
+          <a:p xmlns:a="http://schemas.openxmlformats.org/drawingml/2006/main">
+            <a:r>
+              <a:t>AI-generated concept illustration for Read the screen in categories. This illustration supports discussion and is not a photograph of the school installation, a software screenshot, or a machine-setting guide. Original source reference images remain on this slide where present.</a:t>
+            </a:r>
+          </a:p>
         </p:txBody>
       </p:sp>
       <p:sp>
@@ -897,6 +957,26 @@
               <a:t>Use the section’s ten questions for individual retrieval and feedback. Do not infer practical competence from online completion.</a:t>
             </a:r>
           </a:p>
+          <a:p xmlns:a="http://schemas.openxmlformats.org/drawingml/2006/main">
+            <a:r>
+              <a:t/>
+            </a:r>
+          </a:p>
+          <a:p xmlns:a="http://schemas.openxmlformats.org/drawingml/2006/main">
+            <a:r>
+              <a:t/>
+            </a:r>
+          </a:p>
+          <a:p xmlns:a="http://schemas.openxmlformats.org/drawingml/2006/main">
+            <a:r>
+              <a:t>ILLUSTRATIVE IMAGE</a:t>
+            </a:r>
+          </a:p>
+          <a:p xmlns:a="http://schemas.openxmlformats.org/drawingml/2006/main">
+            <a:r>
+              <a:t>AI-generated concept illustration for Match the whole recipe. This illustration supports discussion and is not a photograph of the school installation, a software screenshot, or a machine-setting guide. Original source reference images remain on this slide where present.</a:t>
+            </a:r>
+          </a:p>
         </p:txBody>
       </p:sp>
       <p:sp>
@@ -1067,6 +1147,26 @@
               <a:t>Use the section’s ten questions for individual retrieval and feedback. Do not infer practical competence from online completion.</a:t>
             </a:r>
           </a:p>
+          <a:p xmlns:a="http://schemas.openxmlformats.org/drawingml/2006/main">
+            <a:r>
+              <a:t/>
+            </a:r>
+          </a:p>
+          <a:p xmlns:a="http://schemas.openxmlformats.org/drawingml/2006/main">
+            <a:r>
+              <a:t/>
+            </a:r>
+          </a:p>
+          <a:p xmlns:a="http://schemas.openxmlformats.org/drawingml/2006/main">
+            <a:r>
+              <a:t>ILLUSTRATIVE IMAGE</a:t>
+            </a:r>
+          </a:p>
+          <a:p xmlns:a="http://schemas.openxmlformats.org/drawingml/2006/main">
+            <a:r>
+              <a:t>AI-generated concept illustration for A dry run still moves the machine. This illustration supports discussion and is not a photograph of the school installation, a software screenshot, or a machine-setting guide. Original source reference images remain on this slide where present.</a:t>
+            </a:r>
+          </a:p>
         </p:txBody>
       </p:sp>
       <p:sp>
@@ -1152,6 +1252,26 @@
               <a:t>Explain why no arc does not make entry safe. Use the operating guide to locate Simul.</a:t>
             </a:r>
           </a:p>
+          <a:p xmlns:a="http://schemas.openxmlformats.org/drawingml/2006/main">
+            <a:r>
+              <a:t/>
+            </a:r>
+          </a:p>
+          <a:p xmlns:a="http://schemas.openxmlformats.org/drawingml/2006/main">
+            <a:r>
+              <a:t/>
+            </a:r>
+          </a:p>
+          <a:p xmlns:a="http://schemas.openxmlformats.org/drawingml/2006/main">
+            <a:r>
+              <a:t>ILLUSTRATIVE IMAGE</a:t>
+            </a:r>
+          </a:p>
+          <a:p xmlns:a="http://schemas.openxmlformats.org/drawingml/2006/main">
+            <a:r>
+              <a:t>AI-generated concept illustration for Pause before looking back. This illustration supports discussion and is not a photograph of the school installation, a software screenshot, or a machine-setting guide. Original source reference images remain on this slide where present.</a:t>
+            </a:r>
+          </a:p>
         </p:txBody>
       </p:sp>
       <p:sp>
@@ -1237,6 +1357,26 @@
               <a:t>Maintains teacher-only authority, screened operator separation and the required isolation and handling boundary.</a:t>
             </a:r>
           </a:p>
+          <a:p xmlns:a="http://schemas.openxmlformats.org/drawingml/2006/main">
+            <a:r>
+              <a:t/>
+            </a:r>
+          </a:p>
+          <a:p xmlns:a="http://schemas.openxmlformats.org/drawingml/2006/main">
+            <a:r>
+              <a:t/>
+            </a:r>
+          </a:p>
+          <a:p xmlns:a="http://schemas.openxmlformats.org/drawingml/2006/main">
+            <a:r>
+              <a:t>ILLUSTRATIVE IMAGE</a:t>
+            </a:r>
+          </a:p>
+          <a:p xmlns:a="http://schemas.openxmlformats.org/drawingml/2006/main">
+            <a:r>
+              <a:t>AI-generated concept illustration for Explain your decision with evidence. This illustration supports discussion and is not a photograph of the school installation, a software screenshot, or a machine-setting guide. Original source reference images remain on this slide where present.</a:t>
+            </a:r>
+          </a:p>
         </p:txBody>
       </p:sp>
       <p:sp>
@@ -1305,6 +1445,26 @@
           <a:p xmlns:a="http://schemas.openxmlformats.org/drawingml/2006/main">
             <a:r>
               <a:t>Open modules/module-04.html#module-04-review. Review completion and feedback rather than treating checked answers as a competence result. Keep original CAD files separately. Students should state their own contribution and identify teacher-controlled production honestly.</a:t>
+            </a:r>
+          </a:p>
+          <a:p xmlns:a="http://schemas.openxmlformats.org/drawingml/2006/main">
+            <a:r>
+              <a:t/>
+            </a:r>
+          </a:p>
+          <a:p xmlns:a="http://schemas.openxmlformats.org/drawingml/2006/main">
+            <a:r>
+              <a:t/>
+            </a:r>
+          </a:p>
+          <a:p xmlns:a="http://schemas.openxmlformats.org/drawingml/2006/main">
+            <a:r>
+              <a:t>ILLUSTRATIVE IMAGE</a:t>
+            </a:r>
+          </a:p>
+          <a:p xmlns:a="http://schemas.openxmlformats.org/drawingml/2006/main">
+            <a:r>
+              <a:t>AI-generated concept illustration for Leave with something useful. This illustration supports discussion and is not a photograph of the school installation, a software screenshot, or a machine-setting guide. Original source reference images remain on this slide where present.</a:t>
             </a:r>
           </a:p>
         </p:txBody>
@@ -1372,7 +1532,7 @@
   </p:cSld>
   <p:clrMap bg1="lt1" tx1="dk1" bg2="lt2" tx2="dk2" accent1="accent1" accent2="accent2" accent3="accent3" accent4="accent4" accent5="accent5" accent6="accent6" hlink="hlink" folHlink="folHlink"/>
   <p:sldLayoutIdLst>
-    <p:sldLayoutId xmlns:r="http://schemas.openxmlformats.org/officeDocument/2006/relationships" id="2147483649" r:id="R3ce0885c2c8345d6"/>
+    <p:sldLayoutId xmlns:r="http://schemas.openxmlformats.org/officeDocument/2006/relationships" id="2147483649" r:id="R55c2ce985add437b"/>
   </p:sldLayoutIdLst>
   <p:txStyles>
     <p:titleStyle>
@@ -1982,6 +2142,7 @@
           <a:lstStyle xmlns:a="http://schemas.openxmlformats.org/drawingml/2006/main"/>
           <a:p xmlns:a="http://schemas.openxmlformats.org/drawingml/2006/main">
             <a:pPr>
+              <a:buNone/>
               <a:defRPr sz="1200" b="1">
                 <a:solidFill>
                   <a:srgbClr val="2F6079"/>
@@ -2039,6 +2200,7 @@
           <a:lstStyle xmlns:a="http://schemas.openxmlformats.org/drawingml/2006/main"/>
           <a:p xmlns:a="http://schemas.openxmlformats.org/drawingml/2006/main">
             <a:pPr>
+              <a:buNone/>
               <a:defRPr sz="1050" b="0">
                 <a:solidFill>
                   <a:srgbClr val="526571"/>
@@ -2096,6 +2258,7 @@
           <a:lstStyle xmlns:a="http://schemas.openxmlformats.org/drawingml/2006/main"/>
           <a:p xmlns:a="http://schemas.openxmlformats.org/drawingml/2006/main">
             <a:pPr>
+              <a:buNone/>
               <a:defRPr sz="1125" b="1">
                 <a:solidFill>
                   <a:srgbClr val="2F6079"/>
@@ -2153,6 +2316,7 @@
           <a:lstStyle xmlns:a="http://schemas.openxmlformats.org/drawingml/2006/main"/>
           <a:p xmlns:a="http://schemas.openxmlformats.org/drawingml/2006/main">
             <a:pPr>
+              <a:buNone/>
               <a:defRPr sz="3525" b="1">
                 <a:solidFill>
                   <a:srgbClr val="18303F"/>
@@ -2210,6 +2374,7 @@
           <a:lstStyle xmlns:a="http://schemas.openxmlformats.org/drawingml/2006/main"/>
           <a:p xmlns:a="http://schemas.openxmlformats.org/drawingml/2006/main">
             <a:pPr>
+              <a:buNone/>
               <a:defRPr sz="2025" b="0">
                 <a:solidFill>
                   <a:srgbClr val="18303F"/>
@@ -2267,6 +2432,7 @@
           <a:lstStyle xmlns:a="http://schemas.openxmlformats.org/drawingml/2006/main"/>
           <a:p xmlns:a="http://schemas.openxmlformats.org/drawingml/2006/main">
             <a:pPr>
+              <a:buNone/>
               <a:defRPr sz="1725" b="1">
                 <a:solidFill>
                   <a:srgbClr val="2F6079"/>
@@ -2307,7 +2473,7 @@
         <p:spPr>
           <a:xfrm xmlns:a="http://schemas.openxmlformats.org/drawingml/2006/main">
             <a:off x="6334125" y="1009650"/>
-            <a:ext cx="5314950" cy="4933950"/>
+            <a:ext cx="5314950" cy="4400550"/>
           </a:xfrm>
           <a:prstGeom xmlns:a="http://schemas.openxmlformats.org/drawingml/2006/main" prst="rect">
             <a:avLst/>
@@ -2322,20 +2488,20 @@
       </p:sp>
       <p:pic>
         <p:nvPicPr>
-          <p:cNvPr id="19" name=""/>
+          <p:cNvPr id="21" name=""/>
           <p:cNvPicPr>
             <a:picLocks xmlns:a="http://schemas.openxmlformats.org/drawingml/2006/main" noChangeAspect="1"/>
           </p:cNvPicPr>
           <p:nvPr/>
         </p:nvPicPr>
         <p:blipFill>
-          <a:blip xmlns:r="http://schemas.openxmlformats.org/officeDocument/2006/relationships" xmlns:a="http://schemas.openxmlformats.org/drawingml/2006/main" r:embed="R6fb3d802ad424113"/>
+          <a:blip xmlns:r="http://schemas.openxmlformats.org/officeDocument/2006/relationships" xmlns:a="http://schemas.openxmlformats.org/drawingml/2006/main" r:embed="Rf6ddb0dade044739"/>
           <a:stretch xmlns:a="http://schemas.openxmlformats.org/drawingml/2006/main"/>
         </p:blipFill>
         <p:spPr>
           <a:xfrm xmlns:a="http://schemas.openxmlformats.org/drawingml/2006/main">
-            <a:off x="6524625" y="1798221"/>
-            <a:ext cx="4933950" cy="2594807"/>
+            <a:off x="6524625" y="1341438"/>
+            <a:ext cx="4933950" cy="3289300"/>
           </a:xfrm>
           <a:prstGeom xmlns:a="http://schemas.openxmlformats.org/drawingml/2006/main" prst="rect">
             <a:avLst/>
@@ -2358,8 +2524,8 @@
         </p:nvSpPr>
         <p:spPr>
           <a:xfrm xmlns:a="http://schemas.openxmlformats.org/drawingml/2006/main">
-            <a:off x="6543675" y="5238750"/>
-            <a:ext cx="4857750" cy="523875"/>
+            <a:off x="6524625" y="4895850"/>
+            <a:ext cx="4933950" cy="381000"/>
           </a:xfrm>
           <a:prstGeom xmlns:a="http://schemas.openxmlformats.org/drawingml/2006/main" prst="rect">
             <a:avLst/>
@@ -2376,9 +2542,10 @@
           <a:lstStyle xmlns:a="http://schemas.openxmlformats.org/drawingml/2006/main"/>
           <a:p xmlns:a="http://schemas.openxmlformats.org/drawingml/2006/main">
             <a:pPr>
+              <a:buNone/>
               <a:defRPr sz="1275" b="0">
                 <a:solidFill>
-                  <a:srgbClr val="526571"/>
+                  <a:srgbClr val="18303F"/>
                 </a:solidFill>
                 <a:latin typeface="Arial"/>
                 <a:ea typeface="Arial"/>
@@ -2388,13 +2555,13 @@
             <a:r>
               <a:rPr sz="1275" b="0">
                 <a:solidFill>
-                  <a:srgbClr val="526571"/>
-                </a:solidFill>
-                <a:latin typeface="Arial"/>
-                <a:ea typeface="Arial"/>
-                <a:cs typeface="Arial"/>
-              </a:rPr>
-              <a:t>Source reference / teaching example</a:t>
+                  <a:srgbClr val="18303F"/>
+                </a:solidFill>
+                <a:latin typeface="Arial"/>
+                <a:ea typeface="Arial"/>
+                <a:cs typeface="Arial"/>
+              </a:rPr>
+              <a:t>AI-generated concept image</a:t>
             </a:r>
           </a:p>
         </p:txBody>
@@ -2492,6 +2659,7 @@
           <a:lstStyle xmlns:a="http://schemas.openxmlformats.org/drawingml/2006/main"/>
           <a:p xmlns:a="http://schemas.openxmlformats.org/drawingml/2006/main">
             <a:pPr>
+              <a:buNone/>
               <a:defRPr sz="1200" b="1">
                 <a:solidFill>
                   <a:srgbClr val="2F6079"/>
@@ -2549,6 +2717,7 @@
           <a:lstStyle xmlns:a="http://schemas.openxmlformats.org/drawingml/2006/main"/>
           <a:p xmlns:a="http://schemas.openxmlformats.org/drawingml/2006/main">
             <a:pPr>
+              <a:buNone/>
               <a:defRPr sz="1050" b="0">
                 <a:solidFill>
                   <a:srgbClr val="526571"/>
@@ -2606,6 +2775,7 @@
           <a:lstStyle xmlns:a="http://schemas.openxmlformats.org/drawingml/2006/main"/>
           <a:p xmlns:a="http://schemas.openxmlformats.org/drawingml/2006/main">
             <a:pPr>
+              <a:buNone/>
               <a:defRPr sz="1125" b="1">
                 <a:solidFill>
                   <a:srgbClr val="2F6079"/>
@@ -2663,6 +2833,7 @@
           <a:lstStyle xmlns:a="http://schemas.openxmlformats.org/drawingml/2006/main"/>
           <a:p xmlns:a="http://schemas.openxmlformats.org/drawingml/2006/main">
             <a:pPr>
+              <a:buNone/>
               <a:defRPr sz="3225" b="1">
                 <a:solidFill>
                   <a:srgbClr val="18303F"/>
@@ -2720,6 +2891,7 @@
           <a:lstStyle xmlns:a="http://schemas.openxmlformats.org/drawingml/2006/main"/>
           <a:p xmlns:a="http://schemas.openxmlformats.org/drawingml/2006/main">
             <a:pPr>
+              <a:buNone/>
               <a:defRPr sz="3450" b="1">
                 <a:solidFill>
                   <a:srgbClr val="2F6079"/>
@@ -2760,7 +2932,7 @@
         <p:spPr>
           <a:xfrm xmlns:a="http://schemas.openxmlformats.org/drawingml/2006/main">
             <a:off x="1562100" y="2143125"/>
-            <a:ext cx="9620250" cy="742950"/>
+            <a:ext cx="6096000" cy="952500"/>
           </a:xfrm>
           <a:prstGeom xmlns:a="http://schemas.openxmlformats.org/drawingml/2006/main" prst="rect">
             <a:avLst/>
@@ -2777,7 +2949,8 @@
           <a:lstStyle xmlns:a="http://schemas.openxmlformats.org/drawingml/2006/main"/>
           <a:p xmlns:a="http://schemas.openxmlformats.org/drawingml/2006/main">
             <a:pPr>
-              <a:defRPr sz="2175" b="1">
+              <a:buNone/>
+              <a:defRPr sz="2100" b="1">
                 <a:solidFill>
                   <a:srgbClr val="18303F"/>
                 </a:solidFill>
@@ -2787,7 +2960,7 @@
               </a:defRPr>
             </a:pPr>
             <a:r>
-              <a:rPr sz="2175" b="1">
+              <a:rPr sz="2100" b="1">
                 <a:solidFill>
                   <a:srgbClr val="18303F"/>
                 </a:solidFill>
@@ -2834,6 +3007,7 @@
           <a:lstStyle xmlns:a="http://schemas.openxmlformats.org/drawingml/2006/main"/>
           <a:p xmlns:a="http://schemas.openxmlformats.org/drawingml/2006/main">
             <a:pPr>
+              <a:buNone/>
               <a:defRPr sz="3450" b="1">
                 <a:solidFill>
                   <a:srgbClr val="2F6079"/>
@@ -2874,7 +3048,7 @@
         <p:spPr>
           <a:xfrm xmlns:a="http://schemas.openxmlformats.org/drawingml/2006/main">
             <a:off x="1562100" y="3286125"/>
-            <a:ext cx="9620250" cy="742950"/>
+            <a:ext cx="6096000" cy="952500"/>
           </a:xfrm>
           <a:prstGeom xmlns:a="http://schemas.openxmlformats.org/drawingml/2006/main" prst="rect">
             <a:avLst/>
@@ -2891,7 +3065,8 @@
           <a:lstStyle xmlns:a="http://schemas.openxmlformats.org/drawingml/2006/main"/>
           <a:p xmlns:a="http://schemas.openxmlformats.org/drawingml/2006/main">
             <a:pPr>
-              <a:defRPr sz="2175" b="1">
+              <a:buNone/>
+              <a:defRPr sz="2100" b="1">
                 <a:solidFill>
                   <a:srgbClr val="18303F"/>
                 </a:solidFill>
@@ -2901,7 +3076,7 @@
               </a:defRPr>
             </a:pPr>
             <a:r>
-              <a:rPr sz="2175" b="1">
+              <a:rPr sz="2100" b="1">
                 <a:solidFill>
                   <a:srgbClr val="18303F"/>
                 </a:solidFill>
@@ -2948,6 +3123,7 @@
           <a:lstStyle xmlns:a="http://schemas.openxmlformats.org/drawingml/2006/main"/>
           <a:p xmlns:a="http://schemas.openxmlformats.org/drawingml/2006/main">
             <a:pPr>
+              <a:buNone/>
               <a:defRPr sz="3450" b="1">
                 <a:solidFill>
                   <a:srgbClr val="2F6079"/>
@@ -2988,7 +3164,7 @@
         <p:spPr>
           <a:xfrm xmlns:a="http://schemas.openxmlformats.org/drawingml/2006/main">
             <a:off x="1562100" y="4429125"/>
-            <a:ext cx="9620250" cy="742950"/>
+            <a:ext cx="6096000" cy="952500"/>
           </a:xfrm>
           <a:prstGeom xmlns:a="http://schemas.openxmlformats.org/drawingml/2006/main" prst="rect">
             <a:avLst/>
@@ -3005,7 +3181,8 @@
           <a:lstStyle xmlns:a="http://schemas.openxmlformats.org/drawingml/2006/main"/>
           <a:p xmlns:a="http://schemas.openxmlformats.org/drawingml/2006/main">
             <a:pPr>
-              <a:defRPr sz="2175" b="1">
+              <a:buNone/>
+              <a:defRPr sz="2100" b="1">
                 <a:solidFill>
                   <a:srgbClr val="18303F"/>
                 </a:solidFill>
@@ -3015,7 +3192,7 @@
               </a:defRPr>
             </a:pPr>
             <a:r>
-              <a:rPr sz="2175" b="1">
+              <a:rPr sz="2100" b="1">
                 <a:solidFill>
                   <a:srgbClr val="18303F"/>
                 </a:solidFill>
@@ -3062,6 +3239,7 @@
           <a:lstStyle xmlns:a="http://schemas.openxmlformats.org/drawingml/2006/main"/>
           <a:p xmlns:a="http://schemas.openxmlformats.org/drawingml/2006/main">
             <a:pPr>
+              <a:buNone/>
               <a:defRPr sz="1725" b="0">
                 <a:solidFill>
                   <a:srgbClr val="2F6079"/>
@@ -3081,6 +3259,85 @@
                 <a:cs typeface="Arial"/>
               </a:rPr>
               <a:t>Before we begin: which step in the workflow needs the strongest check?</a:t>
+            </a:r>
+          </a:p>
+        </p:txBody>
+      </p:sp>
+      <p:pic>
+        <p:nvPicPr>
+          <p:cNvPr id="28" name=""/>
+          <p:cNvPicPr>
+            <a:picLocks xmlns:a="http://schemas.openxmlformats.org/drawingml/2006/main" noChangeAspect="1"/>
+          </p:cNvPicPr>
+          <p:nvPr/>
+        </p:nvPicPr>
+        <p:blipFill>
+          <a:blip xmlns:r="http://schemas.openxmlformats.org/officeDocument/2006/relationships" xmlns:a="http://schemas.openxmlformats.org/drawingml/2006/main" r:embed="Re185419ab764428f"/>
+          <a:stretch xmlns:a="http://schemas.openxmlformats.org/drawingml/2006/main"/>
+        </p:blipFill>
+        <p:spPr>
+          <a:xfrm xmlns:a="http://schemas.openxmlformats.org/drawingml/2006/main">
+            <a:off x="7858125" y="2444750"/>
+            <a:ext cx="3810000" cy="2540000"/>
+          </a:xfrm>
+          <a:prstGeom xmlns:a="http://schemas.openxmlformats.org/drawingml/2006/main" prst="rect">
+            <a:avLst/>
+          </a:prstGeom>
+        </p:spPr>
+      </p:pic>
+      <p:sp>
+        <p:nvSpPr>
+          <p:cNvPr id="15" name="">
+            <a:extLst xmlns:a="http://schemas.openxmlformats.org/drawingml/2006/main">
+              <a:ext uri="{FF2B5EF4-FFF2-40B4-BE49-F238E27FC236}">
+                <a16:creationId xmlns:a16="http://schemas.microsoft.com/office/drawing/2014/main" id="{238625F2-7DA7-4F97-8FE6-6464AF70D692}"/>
+              </a:ext>
+            </a:extLst>
+          </p:cNvPr>
+          <p:cNvSpPr>
+            <a:spLocks xmlns:a="http://schemas.openxmlformats.org/drawingml/2006/main" noGrp="1"/>
+          </p:cNvSpPr>
+          <p:nvPr/>
+        </p:nvSpPr>
+        <p:spPr>
+          <a:xfrm xmlns:a="http://schemas.openxmlformats.org/drawingml/2006/main">
+            <a:off x="7858125" y="5562600"/>
+            <a:ext cx="3810000" cy="171450"/>
+          </a:xfrm>
+          <a:prstGeom xmlns:a="http://schemas.openxmlformats.org/drawingml/2006/main" prst="rect">
+            <a:avLst/>
+          </a:prstGeom>
+          <a:noFill xmlns:a="http://schemas.openxmlformats.org/drawingml/2006/main"/>
+          <a:ln xmlns:a="http://schemas.openxmlformats.org/drawingml/2006/main" w="0">
+            <a:noFill/>
+          </a:ln>
+        </p:spPr>
+        <p:txBody>
+          <a:bodyPr xmlns:a="http://schemas.openxmlformats.org/drawingml/2006/main">
+            <a:noAutofit/>
+          </a:bodyPr>
+          <a:lstStyle xmlns:a="http://schemas.openxmlformats.org/drawingml/2006/main"/>
+          <a:p xmlns:a="http://schemas.openxmlformats.org/drawingml/2006/main">
+            <a:pPr>
+              <a:defRPr sz="900">
+                <a:solidFill>
+                  <a:srgbClr val="526571"/>
+                </a:solidFill>
+                <a:latin typeface="Arial"/>
+                <a:ea typeface="Arial"/>
+                <a:cs typeface="Arial"/>
+              </a:defRPr>
+            </a:pPr>
+            <a:r>
+              <a:rPr sz="900">
+                <a:solidFill>
+                  <a:srgbClr val="526571"/>
+                </a:solidFill>
+                <a:latin typeface="Arial"/>
+                <a:ea typeface="Arial"/>
+                <a:cs typeface="Arial"/>
+              </a:rPr>
+              <a:t>AI-generated concept image</a:t>
             </a:r>
           </a:p>
         </p:txBody>
@@ -3178,6 +3435,7 @@
           <a:lstStyle xmlns:a="http://schemas.openxmlformats.org/drawingml/2006/main"/>
           <a:p xmlns:a="http://schemas.openxmlformats.org/drawingml/2006/main">
             <a:pPr>
+              <a:buNone/>
               <a:defRPr sz="1200" b="1">
                 <a:solidFill>
                   <a:srgbClr val="2F6079"/>
@@ -3235,6 +3493,7 @@
           <a:lstStyle xmlns:a="http://schemas.openxmlformats.org/drawingml/2006/main"/>
           <a:p xmlns:a="http://schemas.openxmlformats.org/drawingml/2006/main">
             <a:pPr>
+              <a:buNone/>
               <a:defRPr sz="1050" b="0">
                 <a:solidFill>
                   <a:srgbClr val="526571"/>
@@ -3292,6 +3551,7 @@
           <a:lstStyle xmlns:a="http://schemas.openxmlformats.org/drawingml/2006/main"/>
           <a:p xmlns:a="http://schemas.openxmlformats.org/drawingml/2006/main">
             <a:pPr>
+              <a:buNone/>
               <a:defRPr sz="1125" b="1">
                 <a:solidFill>
                   <a:srgbClr val="2F6079"/>
@@ -3349,6 +3609,7 @@
           <a:lstStyle xmlns:a="http://schemas.openxmlformats.org/drawingml/2006/main"/>
           <a:p xmlns:a="http://schemas.openxmlformats.org/drawingml/2006/main">
             <a:pPr>
+              <a:buNone/>
               <a:defRPr sz="2850" b="1">
                 <a:solidFill>
                   <a:srgbClr val="18303F"/>
@@ -3406,6 +3667,7 @@
           <a:lstStyle xmlns:a="http://schemas.openxmlformats.org/drawingml/2006/main"/>
           <a:p xmlns:a="http://schemas.openxmlformats.org/drawingml/2006/main">
             <a:pPr>
+              <a:buNone/>
               <a:defRPr sz="1875" b="0">
                 <a:solidFill>
                   <a:srgbClr val="18303F"/>
@@ -3434,6 +3696,7 @@
           </a:p>
           <a:p xmlns:a="http://schemas.openxmlformats.org/drawingml/2006/main">
             <a:pPr>
+              <a:buNone/>
               <a:defRPr sz="1875" b="0">
                 <a:solidFill>
                   <a:srgbClr val="18303F"/>
@@ -3473,8 +3736,8 @@
         </p:nvSpPr>
         <p:spPr>
           <a:xfrm xmlns:a="http://schemas.openxmlformats.org/drawingml/2006/main">
-            <a:off x="5810250" y="1962150"/>
-            <a:ext cx="5857875" cy="3238500"/>
+            <a:off x="5810250" y="1714500"/>
+            <a:ext cx="5857875" cy="2876550"/>
           </a:xfrm>
           <a:prstGeom xmlns:a="http://schemas.openxmlformats.org/drawingml/2006/main" prst="rect">
             <a:avLst/>
@@ -3489,20 +3752,21 @@
       </p:sp>
       <p:pic>
         <p:nvPicPr>
-          <p:cNvPr id="18" name=""/>
+          <p:cNvPr id="22" name=""/>
           <p:cNvPicPr>
             <a:picLocks xmlns:a="http://schemas.openxmlformats.org/drawingml/2006/main" noChangeAspect="1"/>
           </p:cNvPicPr>
           <p:nvPr/>
         </p:nvPicPr>
         <p:blipFill>
-          <a:blip xmlns:r="http://schemas.openxmlformats.org/officeDocument/2006/relationships" xmlns:a="http://schemas.openxmlformats.org/drawingml/2006/main" r:embed="R2de7e1255cfa46eb"/>
+          <a:blip xmlns:r="http://schemas.openxmlformats.org/officeDocument/2006/relationships" xmlns:a="http://schemas.openxmlformats.org/drawingml/2006/main" r:embed="R3a2114f06e9f4f1e"/>
+          <a:srcRect xmlns:a="http://schemas.openxmlformats.org/drawingml/2006/main" l="0" t="0" r="0" b="0"/>
           <a:stretch xmlns:a="http://schemas.openxmlformats.org/drawingml/2006/main"/>
         </p:blipFill>
         <p:spPr>
           <a:xfrm xmlns:a="http://schemas.openxmlformats.org/drawingml/2006/main">
-            <a:off x="5953125" y="2116185"/>
-            <a:ext cx="5572125" cy="2930429"/>
+            <a:off x="6149270" y="1790700"/>
+            <a:ext cx="5179834" cy="2724150"/>
           </a:xfrm>
           <a:prstGeom xmlns:a="http://schemas.openxmlformats.org/drawingml/2006/main" prst="rect">
             <a:avLst/>
@@ -3525,8 +3789,8 @@
         </p:nvSpPr>
         <p:spPr>
           <a:xfrm xmlns:a="http://schemas.openxmlformats.org/drawingml/2006/main">
-            <a:off x="5838825" y="5324475"/>
-            <a:ext cx="5810250" cy="600075"/>
+            <a:off x="8096250" y="4819650"/>
+            <a:ext cx="3571875" cy="1257300"/>
           </a:xfrm>
           <a:prstGeom xmlns:a="http://schemas.openxmlformats.org/drawingml/2006/main" prst="rect">
             <a:avLst/>
@@ -3543,9 +3807,10 @@
           <a:lstStyle xmlns:a="http://schemas.openxmlformats.org/drawingml/2006/main"/>
           <a:p xmlns:a="http://schemas.openxmlformats.org/drawingml/2006/main">
             <a:pPr>
+              <a:buNone/>
               <a:defRPr sz="1125" b="0">
                 <a:solidFill>
-                  <a:srgbClr val="526571"/>
+                  <a:srgbClr val="18303F"/>
                 </a:solidFill>
                 <a:latin typeface="Arial"/>
                 <a:ea typeface="Arial"/>
@@ -3555,7 +3820,7 @@
             <a:r>
               <a:rPr sz="1125" b="0">
                 <a:solidFill>
-                  <a:srgbClr val="526571"/>
+                  <a:srgbClr val="18303F"/>
                 </a:solidFill>
                 <a:latin typeface="Arial"/>
                 <a:ea typeface="Arial"/>
@@ -3600,6 +3865,7 @@
           <a:lstStyle xmlns:a="http://schemas.openxmlformats.org/drawingml/2006/main"/>
           <a:p xmlns:a="http://schemas.openxmlformats.org/drawingml/2006/main">
             <a:pPr>
+              <a:buNone/>
               <a:defRPr sz="1725" b="1">
                 <a:solidFill>
                   <a:srgbClr val="2F6079"/>
@@ -3619,6 +3885,85 @@
                 <a:cs typeface="Arial"/>
               </a:rPr>
               <a:t>Find one display, one indicator and one control that can cause motion.</a:t>
+            </a:r>
+          </a:p>
+        </p:txBody>
+      </p:sp>
+      <p:pic>
+        <p:nvPicPr>
+          <p:cNvPr id="25" name=""/>
+          <p:cNvPicPr>
+            <a:picLocks xmlns:a="http://schemas.openxmlformats.org/drawingml/2006/main" noChangeAspect="1"/>
+          </p:cNvPicPr>
+          <p:nvPr/>
+        </p:nvPicPr>
+        <p:blipFill>
+          <a:blip xmlns:r="http://schemas.openxmlformats.org/officeDocument/2006/relationships" xmlns:a="http://schemas.openxmlformats.org/drawingml/2006/main" r:embed="Rb7456fe55e6742dd"/>
+          <a:stretch xmlns:a="http://schemas.openxmlformats.org/drawingml/2006/main"/>
+        </p:blipFill>
+        <p:spPr>
+          <a:xfrm xmlns:a="http://schemas.openxmlformats.org/drawingml/2006/main">
+            <a:off x="5826919" y="4762500"/>
+            <a:ext cx="2014538" cy="1343025"/>
+          </a:xfrm>
+          <a:prstGeom xmlns:a="http://schemas.openxmlformats.org/drawingml/2006/main" prst="rect">
+            <a:avLst/>
+          </a:prstGeom>
+        </p:spPr>
+      </p:pic>
+      <p:sp>
+        <p:nvSpPr>
+          <p:cNvPr id="14" name="">
+            <a:extLst xmlns:a="http://schemas.openxmlformats.org/drawingml/2006/main">
+              <a:ext uri="{FF2B5EF4-FFF2-40B4-BE49-F238E27FC236}">
+                <a16:creationId xmlns:a16="http://schemas.microsoft.com/office/drawing/2014/main" id="{09EC626E-ED08-482D-B710-7CB9AA5D19DD}"/>
+              </a:ext>
+            </a:extLst>
+          </p:cNvPr>
+          <p:cNvSpPr>
+            <a:spLocks xmlns:a="http://schemas.openxmlformats.org/drawingml/2006/main" noGrp="1"/>
+          </p:cNvSpPr>
+          <p:nvPr/>
+        </p:nvSpPr>
+        <p:spPr>
+          <a:xfrm xmlns:a="http://schemas.openxmlformats.org/drawingml/2006/main">
+            <a:off x="5810250" y="6115050"/>
+            <a:ext cx="2286000" cy="171450"/>
+          </a:xfrm>
+          <a:prstGeom xmlns:a="http://schemas.openxmlformats.org/drawingml/2006/main" prst="rect">
+            <a:avLst/>
+          </a:prstGeom>
+          <a:noFill xmlns:a="http://schemas.openxmlformats.org/drawingml/2006/main"/>
+          <a:ln xmlns:a="http://schemas.openxmlformats.org/drawingml/2006/main" w="0">
+            <a:noFill/>
+          </a:ln>
+        </p:spPr>
+        <p:txBody>
+          <a:bodyPr xmlns:a="http://schemas.openxmlformats.org/drawingml/2006/main">
+            <a:noAutofit/>
+          </a:bodyPr>
+          <a:lstStyle xmlns:a="http://schemas.openxmlformats.org/drawingml/2006/main"/>
+          <a:p xmlns:a="http://schemas.openxmlformats.org/drawingml/2006/main">
+            <a:pPr>
+              <a:defRPr sz="900">
+                <a:solidFill>
+                  <a:srgbClr val="526571"/>
+                </a:solidFill>
+                <a:latin typeface="Arial"/>
+                <a:ea typeface="Arial"/>
+                <a:cs typeface="Arial"/>
+              </a:defRPr>
+            </a:pPr>
+            <a:r>
+              <a:rPr sz="900">
+                <a:solidFill>
+                  <a:srgbClr val="526571"/>
+                </a:solidFill>
+                <a:latin typeface="Arial"/>
+                <a:ea typeface="Arial"/>
+                <a:cs typeface="Arial"/>
+              </a:rPr>
+              <a:t>AI-generated concept image</a:t>
             </a:r>
           </a:p>
         </p:txBody>
@@ -3716,6 +4061,7 @@
           <a:lstStyle xmlns:a="http://schemas.openxmlformats.org/drawingml/2006/main"/>
           <a:p xmlns:a="http://schemas.openxmlformats.org/drawingml/2006/main">
             <a:pPr>
+              <a:buNone/>
               <a:defRPr sz="1200" b="1">
                 <a:solidFill>
                   <a:srgbClr val="2F6079"/>
@@ -3773,6 +4119,7 @@
           <a:lstStyle xmlns:a="http://schemas.openxmlformats.org/drawingml/2006/main"/>
           <a:p xmlns:a="http://schemas.openxmlformats.org/drawingml/2006/main">
             <a:pPr>
+              <a:buNone/>
               <a:defRPr sz="1050" b="0">
                 <a:solidFill>
                   <a:srgbClr val="526571"/>
@@ -3830,6 +4177,7 @@
           <a:lstStyle xmlns:a="http://schemas.openxmlformats.org/drawingml/2006/main"/>
           <a:p xmlns:a="http://schemas.openxmlformats.org/drawingml/2006/main">
             <a:pPr>
+              <a:buNone/>
               <a:defRPr sz="1125" b="1">
                 <a:solidFill>
                   <a:srgbClr val="2F6079"/>
@@ -3887,6 +4235,7 @@
           <a:lstStyle xmlns:a="http://schemas.openxmlformats.org/drawingml/2006/main"/>
           <a:p xmlns:a="http://schemas.openxmlformats.org/drawingml/2006/main">
             <a:pPr>
+              <a:buNone/>
               <a:defRPr sz="2850" b="1">
                 <a:solidFill>
                   <a:srgbClr val="18303F"/>
@@ -3944,6 +4293,7 @@
           <a:lstStyle xmlns:a="http://schemas.openxmlformats.org/drawingml/2006/main"/>
           <a:p xmlns:a="http://schemas.openxmlformats.org/drawingml/2006/main">
             <a:pPr>
+              <a:buNone/>
               <a:defRPr sz="1875" b="0">
                 <a:solidFill>
                   <a:srgbClr val="18303F"/>
@@ -3972,6 +4322,7 @@
           </a:p>
           <a:p xmlns:a="http://schemas.openxmlformats.org/drawingml/2006/main">
             <a:pPr>
+              <a:buNone/>
               <a:defRPr sz="1875" b="0">
                 <a:solidFill>
                   <a:srgbClr val="18303F"/>
@@ -4011,8 +4362,8 @@
         </p:nvSpPr>
         <p:spPr>
           <a:xfrm xmlns:a="http://schemas.openxmlformats.org/drawingml/2006/main">
-            <a:off x="5810250" y="1962150"/>
-            <a:ext cx="5857875" cy="3238500"/>
+            <a:off x="5810250" y="1714500"/>
+            <a:ext cx="5857875" cy="2876550"/>
           </a:xfrm>
           <a:prstGeom xmlns:a="http://schemas.openxmlformats.org/drawingml/2006/main" prst="rect">
             <a:avLst/>
@@ -4027,20 +4378,21 @@
       </p:sp>
       <p:pic>
         <p:nvPicPr>
-          <p:cNvPr id="18" name=""/>
+          <p:cNvPr id="22" name=""/>
           <p:cNvPicPr>
             <a:picLocks xmlns:a="http://schemas.openxmlformats.org/drawingml/2006/main" noChangeAspect="1"/>
           </p:cNvPicPr>
           <p:nvPr/>
         </p:nvPicPr>
         <p:blipFill>
-          <a:blip xmlns:r="http://schemas.openxmlformats.org/officeDocument/2006/relationships" xmlns:a="http://schemas.openxmlformats.org/drawingml/2006/main" r:embed="R29fab098f4cb49db"/>
+          <a:blip xmlns:r="http://schemas.openxmlformats.org/officeDocument/2006/relationships" xmlns:a="http://schemas.openxmlformats.org/drawingml/2006/main" r:embed="Rb73792893f344011"/>
+          <a:srcRect xmlns:a="http://schemas.openxmlformats.org/drawingml/2006/main" l="0" t="0" r="0" b="0"/>
           <a:stretch xmlns:a="http://schemas.openxmlformats.org/drawingml/2006/main"/>
         </p:blipFill>
         <p:spPr>
           <a:xfrm xmlns:a="http://schemas.openxmlformats.org/drawingml/2006/main">
-            <a:off x="6776999" y="2038350"/>
-            <a:ext cx="3924377" cy="3086100"/>
+            <a:off x="7007124" y="1790700"/>
+            <a:ext cx="3464127" cy="2724150"/>
           </a:xfrm>
           <a:prstGeom xmlns:a="http://schemas.openxmlformats.org/drawingml/2006/main" prst="rect">
             <a:avLst/>
@@ -4063,8 +4415,8 @@
         </p:nvSpPr>
         <p:spPr>
           <a:xfrm xmlns:a="http://schemas.openxmlformats.org/drawingml/2006/main">
-            <a:off x="5838825" y="5324475"/>
-            <a:ext cx="5810250" cy="600075"/>
+            <a:off x="8096250" y="4819650"/>
+            <a:ext cx="3571875" cy="1257300"/>
           </a:xfrm>
           <a:prstGeom xmlns:a="http://schemas.openxmlformats.org/drawingml/2006/main" prst="rect">
             <a:avLst/>
@@ -4081,9 +4433,10 @@
           <a:lstStyle xmlns:a="http://schemas.openxmlformats.org/drawingml/2006/main"/>
           <a:p xmlns:a="http://schemas.openxmlformats.org/drawingml/2006/main">
             <a:pPr>
+              <a:buNone/>
               <a:defRPr sz="1125" b="0">
                 <a:solidFill>
-                  <a:srgbClr val="526571"/>
+                  <a:srgbClr val="18303F"/>
                 </a:solidFill>
                 <a:latin typeface="Arial"/>
                 <a:ea typeface="Arial"/>
@@ -4093,7 +4446,7 @@
             <a:r>
               <a:rPr sz="1125" b="0">
                 <a:solidFill>
-                  <a:srgbClr val="526571"/>
+                  <a:srgbClr val="18303F"/>
                 </a:solidFill>
                 <a:latin typeface="Arial"/>
                 <a:ea typeface="Arial"/>
@@ -4138,6 +4491,7 @@
           <a:lstStyle xmlns:a="http://schemas.openxmlformats.org/drawingml/2006/main"/>
           <a:p xmlns:a="http://schemas.openxmlformats.org/drawingml/2006/main">
             <a:pPr>
+              <a:buNone/>
               <a:defRPr sz="1725" b="1">
                 <a:solidFill>
                   <a:srgbClr val="2F6079"/>
@@ -4157,6 +4511,85 @@
                 <a:cs typeface="Arial"/>
               </a:rPr>
               <a:t>What needs checking away from the computer screen?</a:t>
+            </a:r>
+          </a:p>
+        </p:txBody>
+      </p:sp>
+      <p:pic>
+        <p:nvPicPr>
+          <p:cNvPr id="25" name=""/>
+          <p:cNvPicPr>
+            <a:picLocks xmlns:a="http://schemas.openxmlformats.org/drawingml/2006/main" noChangeAspect="1"/>
+          </p:cNvPicPr>
+          <p:nvPr/>
+        </p:nvPicPr>
+        <p:blipFill>
+          <a:blip xmlns:r="http://schemas.openxmlformats.org/officeDocument/2006/relationships" xmlns:a="http://schemas.openxmlformats.org/drawingml/2006/main" r:embed="Rd9dd5244b2844494"/>
+          <a:stretch xmlns:a="http://schemas.openxmlformats.org/drawingml/2006/main"/>
+        </p:blipFill>
+        <p:spPr>
+          <a:xfrm xmlns:a="http://schemas.openxmlformats.org/drawingml/2006/main">
+            <a:off x="5826919" y="4762500"/>
+            <a:ext cx="2014538" cy="1343025"/>
+          </a:xfrm>
+          <a:prstGeom xmlns:a="http://schemas.openxmlformats.org/drawingml/2006/main" prst="rect">
+            <a:avLst/>
+          </a:prstGeom>
+        </p:spPr>
+      </p:pic>
+      <p:sp>
+        <p:nvSpPr>
+          <p:cNvPr id="14" name="">
+            <a:extLst xmlns:a="http://schemas.openxmlformats.org/drawingml/2006/main">
+              <a:ext uri="{FF2B5EF4-FFF2-40B4-BE49-F238E27FC236}">
+                <a16:creationId xmlns:a16="http://schemas.microsoft.com/office/drawing/2014/main" id="{F0D5E7C0-0E99-4D3B-810A-64D1F917008A}"/>
+              </a:ext>
+            </a:extLst>
+          </p:cNvPr>
+          <p:cNvSpPr>
+            <a:spLocks xmlns:a="http://schemas.openxmlformats.org/drawingml/2006/main" noGrp="1"/>
+          </p:cNvSpPr>
+          <p:nvPr/>
+        </p:nvSpPr>
+        <p:spPr>
+          <a:xfrm xmlns:a="http://schemas.openxmlformats.org/drawingml/2006/main">
+            <a:off x="5810250" y="6115050"/>
+            <a:ext cx="2286000" cy="171450"/>
+          </a:xfrm>
+          <a:prstGeom xmlns:a="http://schemas.openxmlformats.org/drawingml/2006/main" prst="rect">
+            <a:avLst/>
+          </a:prstGeom>
+          <a:noFill xmlns:a="http://schemas.openxmlformats.org/drawingml/2006/main"/>
+          <a:ln xmlns:a="http://schemas.openxmlformats.org/drawingml/2006/main" w="0">
+            <a:noFill/>
+          </a:ln>
+        </p:spPr>
+        <p:txBody>
+          <a:bodyPr xmlns:a="http://schemas.openxmlformats.org/drawingml/2006/main">
+            <a:noAutofit/>
+          </a:bodyPr>
+          <a:lstStyle xmlns:a="http://schemas.openxmlformats.org/drawingml/2006/main"/>
+          <a:p xmlns:a="http://schemas.openxmlformats.org/drawingml/2006/main">
+            <a:pPr>
+              <a:defRPr sz="900">
+                <a:solidFill>
+                  <a:srgbClr val="526571"/>
+                </a:solidFill>
+                <a:latin typeface="Arial"/>
+                <a:ea typeface="Arial"/>
+                <a:cs typeface="Arial"/>
+              </a:defRPr>
+            </a:pPr>
+            <a:r>
+              <a:rPr sz="900">
+                <a:solidFill>
+                  <a:srgbClr val="526571"/>
+                </a:solidFill>
+                <a:latin typeface="Arial"/>
+                <a:ea typeface="Arial"/>
+                <a:cs typeface="Arial"/>
+              </a:rPr>
+              <a:t>AI-generated concept image</a:t>
             </a:r>
           </a:p>
         </p:txBody>
@@ -4254,6 +4687,7 @@
           <a:lstStyle xmlns:a="http://schemas.openxmlformats.org/drawingml/2006/main"/>
           <a:p xmlns:a="http://schemas.openxmlformats.org/drawingml/2006/main">
             <a:pPr>
+              <a:buNone/>
               <a:defRPr sz="1200" b="1">
                 <a:solidFill>
                   <a:srgbClr val="2F6079"/>
@@ -4311,6 +4745,7 @@
           <a:lstStyle xmlns:a="http://schemas.openxmlformats.org/drawingml/2006/main"/>
           <a:p xmlns:a="http://schemas.openxmlformats.org/drawingml/2006/main">
             <a:pPr>
+              <a:buNone/>
               <a:defRPr sz="1050" b="0">
                 <a:solidFill>
                   <a:srgbClr val="526571"/>
@@ -4368,6 +4803,7 @@
           <a:lstStyle xmlns:a="http://schemas.openxmlformats.org/drawingml/2006/main"/>
           <a:p xmlns:a="http://schemas.openxmlformats.org/drawingml/2006/main">
             <a:pPr>
+              <a:buNone/>
               <a:defRPr sz="1125" b="1">
                 <a:solidFill>
                   <a:srgbClr val="2F6079"/>
@@ -4425,6 +4861,7 @@
           <a:lstStyle xmlns:a="http://schemas.openxmlformats.org/drawingml/2006/main"/>
           <a:p xmlns:a="http://schemas.openxmlformats.org/drawingml/2006/main">
             <a:pPr>
+              <a:buNone/>
               <a:defRPr sz="2850" b="1">
                 <a:solidFill>
                   <a:srgbClr val="18303F"/>
@@ -4482,6 +4919,7 @@
           <a:lstStyle xmlns:a="http://schemas.openxmlformats.org/drawingml/2006/main"/>
           <a:p xmlns:a="http://schemas.openxmlformats.org/drawingml/2006/main">
             <a:pPr>
+              <a:buNone/>
               <a:defRPr sz="1875" b="0">
                 <a:solidFill>
                   <a:srgbClr val="18303F"/>
@@ -4510,6 +4948,7 @@
           </a:p>
           <a:p xmlns:a="http://schemas.openxmlformats.org/drawingml/2006/main">
             <a:pPr>
+              <a:buNone/>
               <a:defRPr sz="1875" b="0">
                 <a:solidFill>
                   <a:srgbClr val="18303F"/>
@@ -4549,8 +4988,8 @@
         </p:nvSpPr>
         <p:spPr>
           <a:xfrm xmlns:a="http://schemas.openxmlformats.org/drawingml/2006/main">
-            <a:off x="5810250" y="1962150"/>
-            <a:ext cx="5857875" cy="3238500"/>
+            <a:off x="5810250" y="1714500"/>
+            <a:ext cx="5857875" cy="2876550"/>
           </a:xfrm>
           <a:prstGeom xmlns:a="http://schemas.openxmlformats.org/drawingml/2006/main" prst="rect">
             <a:avLst/>
@@ -4565,20 +5004,21 @@
       </p:sp>
       <p:pic>
         <p:nvPicPr>
-          <p:cNvPr id="18" name=""/>
+          <p:cNvPr id="22" name=""/>
           <p:cNvPicPr>
             <a:picLocks xmlns:a="http://schemas.openxmlformats.org/drawingml/2006/main" noChangeAspect="1"/>
           </p:cNvPicPr>
           <p:nvPr/>
         </p:nvPicPr>
         <p:blipFill>
-          <a:blip xmlns:r="http://schemas.openxmlformats.org/officeDocument/2006/relationships" xmlns:a="http://schemas.openxmlformats.org/drawingml/2006/main" r:embed="Rc6a3bd4f96c943f0"/>
+          <a:blip xmlns:r="http://schemas.openxmlformats.org/officeDocument/2006/relationships" xmlns:a="http://schemas.openxmlformats.org/drawingml/2006/main" r:embed="R4f96801712474cee"/>
+          <a:srcRect xmlns:a="http://schemas.openxmlformats.org/drawingml/2006/main" l="0" t="0" r="0" b="0"/>
           <a:stretch xmlns:a="http://schemas.openxmlformats.org/drawingml/2006/main"/>
         </p:blipFill>
         <p:spPr>
           <a:xfrm xmlns:a="http://schemas.openxmlformats.org/drawingml/2006/main">
-            <a:off x="5953125" y="2116185"/>
-            <a:ext cx="5572125" cy="2930429"/>
+            <a:off x="6149270" y="1790700"/>
+            <a:ext cx="5179834" cy="2724150"/>
           </a:xfrm>
           <a:prstGeom xmlns:a="http://schemas.openxmlformats.org/drawingml/2006/main" prst="rect">
             <a:avLst/>
@@ -4601,8 +5041,8 @@
         </p:nvSpPr>
         <p:spPr>
           <a:xfrm xmlns:a="http://schemas.openxmlformats.org/drawingml/2006/main">
-            <a:off x="5838825" y="5324475"/>
-            <a:ext cx="5810250" cy="600075"/>
+            <a:off x="8096250" y="4819650"/>
+            <a:ext cx="3571875" cy="1257300"/>
           </a:xfrm>
           <a:prstGeom xmlns:a="http://schemas.openxmlformats.org/drawingml/2006/main" prst="rect">
             <a:avLst/>
@@ -4619,9 +5059,10 @@
           <a:lstStyle xmlns:a="http://schemas.openxmlformats.org/drawingml/2006/main"/>
           <a:p xmlns:a="http://schemas.openxmlformats.org/drawingml/2006/main">
             <a:pPr>
+              <a:buNone/>
               <a:defRPr sz="1125" b="0">
                 <a:solidFill>
-                  <a:srgbClr val="526571"/>
+                  <a:srgbClr val="18303F"/>
                 </a:solidFill>
                 <a:latin typeface="Arial"/>
                 <a:ea typeface="Arial"/>
@@ -4631,7 +5072,7 @@
             <a:r>
               <a:rPr sz="1125" b="0">
                 <a:solidFill>
-                  <a:srgbClr val="526571"/>
+                  <a:srgbClr val="18303F"/>
                 </a:solidFill>
                 <a:latin typeface="Arial"/>
                 <a:ea typeface="Arial"/>
@@ -4676,6 +5117,7 @@
           <a:lstStyle xmlns:a="http://schemas.openxmlformats.org/drawingml/2006/main"/>
           <a:p xmlns:a="http://schemas.openxmlformats.org/drawingml/2006/main">
             <a:pPr>
+              <a:buNone/>
               <a:defRPr sz="1725" b="1">
                 <a:solidFill>
                   <a:srgbClr val="2F6079"/>
@@ -4695,6 +5137,85 @@
                 <a:cs typeface="Arial"/>
               </a:rPr>
               <a:t>Explain why no arc does not make entry safe. Use the operating guide to locate Simul.</a:t>
+            </a:r>
+          </a:p>
+        </p:txBody>
+      </p:sp>
+      <p:pic>
+        <p:nvPicPr>
+          <p:cNvPr id="25" name=""/>
+          <p:cNvPicPr>
+            <a:picLocks xmlns:a="http://schemas.openxmlformats.org/drawingml/2006/main" noChangeAspect="1"/>
+          </p:cNvPicPr>
+          <p:nvPr/>
+        </p:nvPicPr>
+        <p:blipFill>
+          <a:blip xmlns:r="http://schemas.openxmlformats.org/officeDocument/2006/relationships" xmlns:a="http://schemas.openxmlformats.org/drawingml/2006/main" r:embed="R9468e53859cd4dee"/>
+          <a:stretch xmlns:a="http://schemas.openxmlformats.org/drawingml/2006/main"/>
+        </p:blipFill>
+        <p:spPr>
+          <a:xfrm xmlns:a="http://schemas.openxmlformats.org/drawingml/2006/main">
+            <a:off x="5826919" y="4762500"/>
+            <a:ext cx="2014538" cy="1343025"/>
+          </a:xfrm>
+          <a:prstGeom xmlns:a="http://schemas.openxmlformats.org/drawingml/2006/main" prst="rect">
+            <a:avLst/>
+          </a:prstGeom>
+        </p:spPr>
+      </p:pic>
+      <p:sp>
+        <p:nvSpPr>
+          <p:cNvPr id="14" name="">
+            <a:extLst xmlns:a="http://schemas.openxmlformats.org/drawingml/2006/main">
+              <a:ext uri="{FF2B5EF4-FFF2-40B4-BE49-F238E27FC236}">
+                <a16:creationId xmlns:a16="http://schemas.microsoft.com/office/drawing/2014/main" id="{C258CB18-613A-466A-AE3E-28CC741C8CEF}"/>
+              </a:ext>
+            </a:extLst>
+          </p:cNvPr>
+          <p:cNvSpPr>
+            <a:spLocks xmlns:a="http://schemas.openxmlformats.org/drawingml/2006/main" noGrp="1"/>
+          </p:cNvSpPr>
+          <p:nvPr/>
+        </p:nvSpPr>
+        <p:spPr>
+          <a:xfrm xmlns:a="http://schemas.openxmlformats.org/drawingml/2006/main">
+            <a:off x="5810250" y="6115050"/>
+            <a:ext cx="2286000" cy="171450"/>
+          </a:xfrm>
+          <a:prstGeom xmlns:a="http://schemas.openxmlformats.org/drawingml/2006/main" prst="rect">
+            <a:avLst/>
+          </a:prstGeom>
+          <a:noFill xmlns:a="http://schemas.openxmlformats.org/drawingml/2006/main"/>
+          <a:ln xmlns:a="http://schemas.openxmlformats.org/drawingml/2006/main" w="0">
+            <a:noFill/>
+          </a:ln>
+        </p:spPr>
+        <p:txBody>
+          <a:bodyPr xmlns:a="http://schemas.openxmlformats.org/drawingml/2006/main">
+            <a:noAutofit/>
+          </a:bodyPr>
+          <a:lstStyle xmlns:a="http://schemas.openxmlformats.org/drawingml/2006/main"/>
+          <a:p xmlns:a="http://schemas.openxmlformats.org/drawingml/2006/main">
+            <a:pPr>
+              <a:defRPr sz="900">
+                <a:solidFill>
+                  <a:srgbClr val="526571"/>
+                </a:solidFill>
+                <a:latin typeface="Arial"/>
+                <a:ea typeface="Arial"/>
+                <a:cs typeface="Arial"/>
+              </a:defRPr>
+            </a:pPr>
+            <a:r>
+              <a:rPr sz="900">
+                <a:solidFill>
+                  <a:srgbClr val="526571"/>
+                </a:solidFill>
+                <a:latin typeface="Arial"/>
+                <a:ea typeface="Arial"/>
+                <a:cs typeface="Arial"/>
+              </a:rPr>
+              <a:t>AI-generated concept image</a:t>
             </a:r>
           </a:p>
         </p:txBody>
@@ -4792,6 +5313,7 @@
           <a:lstStyle xmlns:a="http://schemas.openxmlformats.org/drawingml/2006/main"/>
           <a:p xmlns:a="http://schemas.openxmlformats.org/drawingml/2006/main">
             <a:pPr>
+              <a:buNone/>
               <a:defRPr sz="1200" b="1">
                 <a:solidFill>
                   <a:srgbClr val="2F6079"/>
@@ -4849,6 +5371,7 @@
           <a:lstStyle xmlns:a="http://schemas.openxmlformats.org/drawingml/2006/main"/>
           <a:p xmlns:a="http://schemas.openxmlformats.org/drawingml/2006/main">
             <a:pPr>
+              <a:buNone/>
               <a:defRPr sz="1050" b="0">
                 <a:solidFill>
                   <a:srgbClr val="526571"/>
@@ -4906,6 +5429,7 @@
           <a:lstStyle xmlns:a="http://schemas.openxmlformats.org/drawingml/2006/main"/>
           <a:p xmlns:a="http://schemas.openxmlformats.org/drawingml/2006/main">
             <a:pPr>
+              <a:buNone/>
               <a:defRPr sz="1125" b="1">
                 <a:solidFill>
                   <a:srgbClr val="2F6079"/>
@@ -4963,6 +5487,7 @@
           <a:lstStyle xmlns:a="http://schemas.openxmlformats.org/drawingml/2006/main"/>
           <a:p xmlns:a="http://schemas.openxmlformats.org/drawingml/2006/main">
             <a:pPr>
+              <a:buNone/>
               <a:defRPr sz="3225" b="1">
                 <a:solidFill>
                   <a:srgbClr val="18303F"/>
@@ -5020,6 +5545,7 @@
           <a:lstStyle xmlns:a="http://schemas.openxmlformats.org/drawingml/2006/main"/>
           <a:p xmlns:a="http://schemas.openxmlformats.org/drawingml/2006/main">
             <a:pPr>
+              <a:buNone/>
               <a:defRPr sz="2400" b="1">
                 <a:solidFill>
                   <a:srgbClr val="2F6079"/>
@@ -5060,7 +5586,7 @@
         <p:spPr>
           <a:xfrm xmlns:a="http://schemas.openxmlformats.org/drawingml/2006/main">
             <a:off x="1352550" y="2124075"/>
-            <a:ext cx="10096500" cy="914400"/>
+            <a:ext cx="5619750" cy="1143000"/>
           </a:xfrm>
           <a:prstGeom xmlns:a="http://schemas.openxmlformats.org/drawingml/2006/main" prst="rect">
             <a:avLst/>
@@ -5077,7 +5603,8 @@
           <a:lstStyle xmlns:a="http://schemas.openxmlformats.org/drawingml/2006/main"/>
           <a:p xmlns:a="http://schemas.openxmlformats.org/drawingml/2006/main">
             <a:pPr>
-              <a:defRPr sz="2100" b="0">
+              <a:buNone/>
+              <a:defRPr sz="2025" b="0">
                 <a:solidFill>
                   <a:srgbClr val="18303F"/>
                 </a:solidFill>
@@ -5087,7 +5614,7 @@
               </a:defRPr>
             </a:pPr>
             <a:r>
-              <a:rPr sz="2100" b="0">
+              <a:rPr sz="2025" b="0">
                 <a:solidFill>
                   <a:srgbClr val="18303F"/>
                 </a:solidFill>
@@ -5134,6 +5661,7 @@
           <a:lstStyle xmlns:a="http://schemas.openxmlformats.org/drawingml/2006/main"/>
           <a:p xmlns:a="http://schemas.openxmlformats.org/drawingml/2006/main">
             <a:pPr>
+              <a:buNone/>
               <a:defRPr sz="2400" b="1">
                 <a:solidFill>
                   <a:srgbClr val="2F6079"/>
@@ -5174,7 +5702,7 @@
         <p:spPr>
           <a:xfrm xmlns:a="http://schemas.openxmlformats.org/drawingml/2006/main">
             <a:off x="1352550" y="3276600"/>
-            <a:ext cx="10096500" cy="914400"/>
+            <a:ext cx="5619750" cy="1143000"/>
           </a:xfrm>
           <a:prstGeom xmlns:a="http://schemas.openxmlformats.org/drawingml/2006/main" prst="rect">
             <a:avLst/>
@@ -5191,7 +5719,8 @@
           <a:lstStyle xmlns:a="http://schemas.openxmlformats.org/drawingml/2006/main"/>
           <a:p xmlns:a="http://schemas.openxmlformats.org/drawingml/2006/main">
             <a:pPr>
-              <a:defRPr sz="2100" b="0">
+              <a:buNone/>
+              <a:defRPr sz="2025" b="0">
                 <a:solidFill>
                   <a:srgbClr val="18303F"/>
                 </a:solidFill>
@@ -5201,7 +5730,7 @@
               </a:defRPr>
             </a:pPr>
             <a:r>
-              <a:rPr sz="2100" b="0">
+              <a:rPr sz="2025" b="0">
                 <a:solidFill>
                   <a:srgbClr val="18303F"/>
                 </a:solidFill>
@@ -5248,6 +5777,7 @@
           <a:lstStyle xmlns:a="http://schemas.openxmlformats.org/drawingml/2006/main"/>
           <a:p xmlns:a="http://schemas.openxmlformats.org/drawingml/2006/main">
             <a:pPr>
+              <a:buNone/>
               <a:defRPr sz="2400" b="1">
                 <a:solidFill>
                   <a:srgbClr val="2F6079"/>
@@ -5288,7 +5818,7 @@
         <p:spPr>
           <a:xfrm xmlns:a="http://schemas.openxmlformats.org/drawingml/2006/main">
             <a:off x="1352550" y="4429125"/>
-            <a:ext cx="10096500" cy="914400"/>
+            <a:ext cx="5619750" cy="1143000"/>
           </a:xfrm>
           <a:prstGeom xmlns:a="http://schemas.openxmlformats.org/drawingml/2006/main" prst="rect">
             <a:avLst/>
@@ -5305,7 +5835,8 @@
           <a:lstStyle xmlns:a="http://schemas.openxmlformats.org/drawingml/2006/main"/>
           <a:p xmlns:a="http://schemas.openxmlformats.org/drawingml/2006/main">
             <a:pPr>
-              <a:defRPr sz="2100" b="0">
+              <a:buNone/>
+              <a:defRPr sz="2025" b="0">
                 <a:solidFill>
                   <a:srgbClr val="18303F"/>
                 </a:solidFill>
@@ -5315,7 +5846,7 @@
               </a:defRPr>
             </a:pPr>
             <a:r>
-              <a:rPr sz="2100" b="0">
+              <a:rPr sz="2025" b="0">
                 <a:solidFill>
                   <a:srgbClr val="18303F"/>
                 </a:solidFill>
@@ -5324,6 +5855,85 @@
                 <a:cs typeface="Arial"/>
               </a:rPr>
               <a:t>Explain why no arc does not make entry safe. Use the operating guide to locate Simul.</a:t>
+            </a:r>
+          </a:p>
+        </p:txBody>
+      </p:sp>
+      <p:pic>
+        <p:nvPicPr>
+          <p:cNvPr id="26" name=""/>
+          <p:cNvPicPr>
+            <a:picLocks xmlns:a="http://schemas.openxmlformats.org/drawingml/2006/main" noChangeAspect="1"/>
+          </p:cNvPicPr>
+          <p:nvPr/>
+        </p:nvPicPr>
+        <p:blipFill>
+          <a:blip xmlns:r="http://schemas.openxmlformats.org/officeDocument/2006/relationships" xmlns:a="http://schemas.openxmlformats.org/drawingml/2006/main" r:embed="R090ff3fcb5f54ca2"/>
+          <a:stretch xmlns:a="http://schemas.openxmlformats.org/drawingml/2006/main"/>
+        </p:blipFill>
+        <p:spPr>
+          <a:xfrm xmlns:a="http://schemas.openxmlformats.org/drawingml/2006/main">
+            <a:off x="7620000" y="2484438"/>
+            <a:ext cx="4048125" cy="2698750"/>
+          </a:xfrm>
+          <a:prstGeom xmlns:a="http://schemas.openxmlformats.org/drawingml/2006/main" prst="rect">
+            <a:avLst/>
+          </a:prstGeom>
+        </p:spPr>
+      </p:pic>
+      <p:sp>
+        <p:nvSpPr>
+          <p:cNvPr id="14" name="">
+            <a:extLst xmlns:a="http://schemas.openxmlformats.org/drawingml/2006/main">
+              <a:ext uri="{FF2B5EF4-FFF2-40B4-BE49-F238E27FC236}">
+                <a16:creationId xmlns:a16="http://schemas.microsoft.com/office/drawing/2014/main" id="{EC6FC43B-3F6B-440E-94C6-298F9686D179}"/>
+              </a:ext>
+            </a:extLst>
+          </p:cNvPr>
+          <p:cNvSpPr>
+            <a:spLocks xmlns:a="http://schemas.openxmlformats.org/drawingml/2006/main" noGrp="1"/>
+          </p:cNvSpPr>
+          <p:nvPr/>
+        </p:nvSpPr>
+        <p:spPr>
+          <a:xfrm xmlns:a="http://schemas.openxmlformats.org/drawingml/2006/main">
+            <a:off x="7620000" y="5734050"/>
+            <a:ext cx="4048125" cy="171450"/>
+          </a:xfrm>
+          <a:prstGeom xmlns:a="http://schemas.openxmlformats.org/drawingml/2006/main" prst="rect">
+            <a:avLst/>
+          </a:prstGeom>
+          <a:noFill xmlns:a="http://schemas.openxmlformats.org/drawingml/2006/main"/>
+          <a:ln xmlns:a="http://schemas.openxmlformats.org/drawingml/2006/main" w="0">
+            <a:noFill/>
+          </a:ln>
+        </p:spPr>
+        <p:txBody>
+          <a:bodyPr xmlns:a="http://schemas.openxmlformats.org/drawingml/2006/main">
+            <a:noAutofit/>
+          </a:bodyPr>
+          <a:lstStyle xmlns:a="http://schemas.openxmlformats.org/drawingml/2006/main"/>
+          <a:p xmlns:a="http://schemas.openxmlformats.org/drawingml/2006/main">
+            <a:pPr>
+              <a:defRPr sz="900">
+                <a:solidFill>
+                  <a:srgbClr val="526571"/>
+                </a:solidFill>
+                <a:latin typeface="Arial"/>
+                <a:ea typeface="Arial"/>
+                <a:cs typeface="Arial"/>
+              </a:defRPr>
+            </a:pPr>
+            <a:r>
+              <a:rPr sz="900">
+                <a:solidFill>
+                  <a:srgbClr val="526571"/>
+                </a:solidFill>
+                <a:latin typeface="Arial"/>
+                <a:ea typeface="Arial"/>
+                <a:cs typeface="Arial"/>
+              </a:rPr>
+              <a:t>AI-generated concept image</a:t>
             </a:r>
           </a:p>
         </p:txBody>
@@ -5421,6 +6031,7 @@
           <a:lstStyle xmlns:a="http://schemas.openxmlformats.org/drawingml/2006/main"/>
           <a:p xmlns:a="http://schemas.openxmlformats.org/drawingml/2006/main">
             <a:pPr>
+              <a:buNone/>
               <a:defRPr sz="1200" b="1">
                 <a:solidFill>
                   <a:srgbClr val="2F6079"/>
@@ -5478,6 +6089,7 @@
           <a:lstStyle xmlns:a="http://schemas.openxmlformats.org/drawingml/2006/main"/>
           <a:p xmlns:a="http://schemas.openxmlformats.org/drawingml/2006/main">
             <a:pPr>
+              <a:buNone/>
               <a:defRPr sz="1050" b="0">
                 <a:solidFill>
                   <a:srgbClr val="526571"/>
@@ -5535,6 +6147,7 @@
           <a:lstStyle xmlns:a="http://schemas.openxmlformats.org/drawingml/2006/main"/>
           <a:p xmlns:a="http://schemas.openxmlformats.org/drawingml/2006/main">
             <a:pPr>
+              <a:buNone/>
               <a:defRPr sz="1125" b="1">
                 <a:solidFill>
                   <a:srgbClr val="2F6079"/>
@@ -5592,6 +6205,7 @@
           <a:lstStyle xmlns:a="http://schemas.openxmlformats.org/drawingml/2006/main"/>
           <a:p xmlns:a="http://schemas.openxmlformats.org/drawingml/2006/main">
             <a:pPr>
+              <a:buNone/>
               <a:defRPr sz="2925" b="1">
                 <a:solidFill>
                   <a:srgbClr val="18303F"/>
@@ -5631,8 +6245,8 @@
         </p:nvSpPr>
         <p:spPr>
           <a:xfrm xmlns:a="http://schemas.openxmlformats.org/drawingml/2006/main">
-            <a:off x="514350" y="1962150"/>
-            <a:ext cx="11049000" cy="1181100"/>
+            <a:off x="514350" y="1809750"/>
+            <a:ext cx="11049000" cy="1409700"/>
           </a:xfrm>
           <a:prstGeom xmlns:a="http://schemas.openxmlformats.org/drawingml/2006/main" prst="rect">
             <a:avLst/>
@@ -5649,6 +6263,7 @@
           <a:lstStyle xmlns:a="http://schemas.openxmlformats.org/drawingml/2006/main"/>
           <a:p xmlns:a="http://schemas.openxmlformats.org/drawingml/2006/main">
             <a:pPr>
+              <a:buNone/>
               <a:defRPr sz="2025" b="1">
                 <a:solidFill>
                   <a:srgbClr val="18303F"/>
@@ -5688,8 +6303,8 @@
         </p:nvSpPr>
         <p:spPr>
           <a:xfrm xmlns:a="http://schemas.openxmlformats.org/drawingml/2006/main">
-            <a:off x="514350" y="3476625"/>
-            <a:ext cx="742950" cy="495300"/>
+            <a:off x="514350" y="3333750"/>
+            <a:ext cx="742950" cy="666750"/>
           </a:xfrm>
           <a:prstGeom xmlns:a="http://schemas.openxmlformats.org/drawingml/2006/main" prst="rect">
             <a:avLst/>
@@ -5706,6 +6321,7 @@
           <a:lstStyle xmlns:a="http://schemas.openxmlformats.org/drawingml/2006/main"/>
           <a:p xmlns:a="http://schemas.openxmlformats.org/drawingml/2006/main">
             <a:pPr>
+              <a:buNone/>
               <a:defRPr sz="2250" b="1">
                 <a:solidFill>
                   <a:srgbClr val="2F6079"/>
@@ -5745,8 +6361,8 @@
         </p:nvSpPr>
         <p:spPr>
           <a:xfrm xmlns:a="http://schemas.openxmlformats.org/drawingml/2006/main">
-            <a:off x="1485900" y="3476625"/>
-            <a:ext cx="10001250" cy="714375"/>
+            <a:off x="1485900" y="3333750"/>
+            <a:ext cx="6191250" cy="895350"/>
           </a:xfrm>
           <a:prstGeom xmlns:a="http://schemas.openxmlformats.org/drawingml/2006/main" prst="rect">
             <a:avLst/>
@@ -5763,6 +6379,7 @@
           <a:lstStyle xmlns:a="http://schemas.openxmlformats.org/drawingml/2006/main"/>
           <a:p xmlns:a="http://schemas.openxmlformats.org/drawingml/2006/main">
             <a:pPr>
+              <a:buNone/>
               <a:defRPr sz="1800" b="0">
                 <a:solidFill>
                   <a:srgbClr val="18303F"/>
@@ -5802,8 +6419,8 @@
         </p:nvSpPr>
         <p:spPr>
           <a:xfrm xmlns:a="http://schemas.openxmlformats.org/drawingml/2006/main">
-            <a:off x="514350" y="4295775"/>
-            <a:ext cx="742950" cy="495300"/>
+            <a:off x="514350" y="4305300"/>
+            <a:ext cx="742950" cy="666750"/>
           </a:xfrm>
           <a:prstGeom xmlns:a="http://schemas.openxmlformats.org/drawingml/2006/main" prst="rect">
             <a:avLst/>
@@ -5820,6 +6437,7 @@
           <a:lstStyle xmlns:a="http://schemas.openxmlformats.org/drawingml/2006/main"/>
           <a:p xmlns:a="http://schemas.openxmlformats.org/drawingml/2006/main">
             <a:pPr>
+              <a:buNone/>
               <a:defRPr sz="2250" b="1">
                 <a:solidFill>
                   <a:srgbClr val="2F6079"/>
@@ -5859,8 +6477,8 @@
         </p:nvSpPr>
         <p:spPr>
           <a:xfrm xmlns:a="http://schemas.openxmlformats.org/drawingml/2006/main">
-            <a:off x="1485900" y="4295775"/>
-            <a:ext cx="10001250" cy="714375"/>
+            <a:off x="1485900" y="4305300"/>
+            <a:ext cx="6191250" cy="895350"/>
           </a:xfrm>
           <a:prstGeom xmlns:a="http://schemas.openxmlformats.org/drawingml/2006/main" prst="rect">
             <a:avLst/>
@@ -5877,6 +6495,7 @@
           <a:lstStyle xmlns:a="http://schemas.openxmlformats.org/drawingml/2006/main"/>
           <a:p xmlns:a="http://schemas.openxmlformats.org/drawingml/2006/main">
             <a:pPr>
+              <a:buNone/>
               <a:defRPr sz="1800" b="0">
                 <a:solidFill>
                   <a:srgbClr val="18303F"/>
@@ -5916,8 +6535,8 @@
         </p:nvSpPr>
         <p:spPr>
           <a:xfrm xmlns:a="http://schemas.openxmlformats.org/drawingml/2006/main">
-            <a:off x="514350" y="5114925"/>
-            <a:ext cx="742950" cy="495300"/>
+            <a:off x="514350" y="5276850"/>
+            <a:ext cx="742950" cy="666750"/>
           </a:xfrm>
           <a:prstGeom xmlns:a="http://schemas.openxmlformats.org/drawingml/2006/main" prst="rect">
             <a:avLst/>
@@ -5934,6 +6553,7 @@
           <a:lstStyle xmlns:a="http://schemas.openxmlformats.org/drawingml/2006/main"/>
           <a:p xmlns:a="http://schemas.openxmlformats.org/drawingml/2006/main">
             <a:pPr>
+              <a:buNone/>
               <a:defRPr sz="2250" b="1">
                 <a:solidFill>
                   <a:srgbClr val="2F6079"/>
@@ -5973,8 +6593,8 @@
         </p:nvSpPr>
         <p:spPr>
           <a:xfrm xmlns:a="http://schemas.openxmlformats.org/drawingml/2006/main">
-            <a:off x="1485900" y="5114925"/>
-            <a:ext cx="10001250" cy="714375"/>
+            <a:off x="1485900" y="5276850"/>
+            <a:ext cx="6191250" cy="895350"/>
           </a:xfrm>
           <a:prstGeom xmlns:a="http://schemas.openxmlformats.org/drawingml/2006/main" prst="rect">
             <a:avLst/>
@@ -5991,6 +6611,7 @@
           <a:lstStyle xmlns:a="http://schemas.openxmlformats.org/drawingml/2006/main"/>
           <a:p xmlns:a="http://schemas.openxmlformats.org/drawingml/2006/main">
             <a:pPr>
+              <a:buNone/>
               <a:defRPr sz="1800" b="0">
                 <a:solidFill>
                   <a:srgbClr val="18303F"/>
@@ -6010,6 +6631,85 @@
                 <a:cs typeface="Arial"/>
               </a:rPr>
               <a:t>Include the operator’s physical separation during any later automatic cutting.</a:t>
+            </a:r>
+          </a:p>
+        </p:txBody>
+      </p:sp>
+      <p:pic>
+        <p:nvPicPr>
+          <p:cNvPr id="28" name=""/>
+          <p:cNvPicPr>
+            <a:picLocks xmlns:a="http://schemas.openxmlformats.org/drawingml/2006/main" noChangeAspect="1"/>
+          </p:cNvPicPr>
+          <p:nvPr/>
+        </p:nvPicPr>
+        <p:blipFill>
+          <a:blip xmlns:r="http://schemas.openxmlformats.org/officeDocument/2006/relationships" xmlns:a="http://schemas.openxmlformats.org/drawingml/2006/main" r:embed="R94fa6f31717f4126"/>
+          <a:stretch xmlns:a="http://schemas.openxmlformats.org/drawingml/2006/main"/>
+        </p:blipFill>
+        <p:spPr>
+          <a:xfrm xmlns:a="http://schemas.openxmlformats.org/drawingml/2006/main">
+            <a:off x="7858125" y="3406775"/>
+            <a:ext cx="3810000" cy="2540000"/>
+          </a:xfrm>
+          <a:prstGeom xmlns:a="http://schemas.openxmlformats.org/drawingml/2006/main" prst="rect">
+            <a:avLst/>
+          </a:prstGeom>
+        </p:spPr>
+      </p:pic>
+      <p:sp>
+        <p:nvSpPr>
+          <p:cNvPr id="15" name="">
+            <a:extLst xmlns:a="http://schemas.openxmlformats.org/drawingml/2006/main">
+              <a:ext uri="{FF2B5EF4-FFF2-40B4-BE49-F238E27FC236}">
+                <a16:creationId xmlns:a16="http://schemas.microsoft.com/office/drawing/2014/main" id="{4355BC72-DF17-404D-BFC8-4366F5C926BE}"/>
+              </a:ext>
+            </a:extLst>
+          </p:cNvPr>
+          <p:cNvSpPr>
+            <a:spLocks xmlns:a="http://schemas.openxmlformats.org/drawingml/2006/main" noGrp="1"/>
+          </p:cNvSpPr>
+          <p:nvPr/>
+        </p:nvSpPr>
+        <p:spPr>
+          <a:xfrm xmlns:a="http://schemas.openxmlformats.org/drawingml/2006/main">
+            <a:off x="7858125" y="6067425"/>
+            <a:ext cx="3810000" cy="171450"/>
+          </a:xfrm>
+          <a:prstGeom xmlns:a="http://schemas.openxmlformats.org/drawingml/2006/main" prst="rect">
+            <a:avLst/>
+          </a:prstGeom>
+          <a:noFill xmlns:a="http://schemas.openxmlformats.org/drawingml/2006/main"/>
+          <a:ln xmlns:a="http://schemas.openxmlformats.org/drawingml/2006/main" w="0">
+            <a:noFill/>
+          </a:ln>
+        </p:spPr>
+        <p:txBody>
+          <a:bodyPr xmlns:a="http://schemas.openxmlformats.org/drawingml/2006/main">
+            <a:noAutofit/>
+          </a:bodyPr>
+          <a:lstStyle xmlns:a="http://schemas.openxmlformats.org/drawingml/2006/main"/>
+          <a:p xmlns:a="http://schemas.openxmlformats.org/drawingml/2006/main">
+            <a:pPr>
+              <a:defRPr sz="900">
+                <a:solidFill>
+                  <a:srgbClr val="526571"/>
+                </a:solidFill>
+                <a:latin typeface="Arial"/>
+                <a:ea typeface="Arial"/>
+                <a:cs typeface="Arial"/>
+              </a:defRPr>
+            </a:pPr>
+            <a:r>
+              <a:rPr sz="900">
+                <a:solidFill>
+                  <a:srgbClr val="526571"/>
+                </a:solidFill>
+                <a:latin typeface="Arial"/>
+                <a:ea typeface="Arial"/>
+                <a:cs typeface="Arial"/>
+              </a:rPr>
+              <a:t>AI-generated concept image</a:t>
             </a:r>
           </a:p>
         </p:txBody>
@@ -6107,6 +6807,7 @@
           <a:lstStyle xmlns:a="http://schemas.openxmlformats.org/drawingml/2006/main"/>
           <a:p xmlns:a="http://schemas.openxmlformats.org/drawingml/2006/main">
             <a:pPr>
+              <a:buNone/>
               <a:defRPr sz="1200" b="1">
                 <a:solidFill>
                   <a:srgbClr val="2F6079"/>
@@ -6164,6 +6865,7 @@
           <a:lstStyle xmlns:a="http://schemas.openxmlformats.org/drawingml/2006/main"/>
           <a:p xmlns:a="http://schemas.openxmlformats.org/drawingml/2006/main">
             <a:pPr>
+              <a:buNone/>
               <a:defRPr sz="1050" b="0">
                 <a:solidFill>
                   <a:srgbClr val="526571"/>
@@ -6221,6 +6923,7 @@
           <a:lstStyle xmlns:a="http://schemas.openxmlformats.org/drawingml/2006/main"/>
           <a:p xmlns:a="http://schemas.openxmlformats.org/drawingml/2006/main">
             <a:pPr>
+              <a:buNone/>
               <a:defRPr sz="1125" b="1">
                 <a:solidFill>
                   <a:srgbClr val="2F6079"/>
@@ -6278,6 +6981,7 @@
           <a:lstStyle xmlns:a="http://schemas.openxmlformats.org/drawingml/2006/main"/>
           <a:p xmlns:a="http://schemas.openxmlformats.org/drawingml/2006/main">
             <a:pPr>
+              <a:buNone/>
               <a:defRPr sz="3225" b="1">
                 <a:solidFill>
                   <a:srgbClr val="18303F"/>
@@ -6318,7 +7022,7 @@
         <p:spPr>
           <a:xfrm xmlns:a="http://schemas.openxmlformats.org/drawingml/2006/main">
             <a:off x="514350" y="2038350"/>
-            <a:ext cx="10953750" cy="2190750"/>
+            <a:ext cx="7524750" cy="2571750"/>
           </a:xfrm>
           <a:prstGeom xmlns:a="http://schemas.openxmlformats.org/drawingml/2006/main" prst="rect">
             <a:avLst/>
@@ -6347,8 +7051,8 @@
         </p:nvSpPr>
         <p:spPr>
           <a:xfrm xmlns:a="http://schemas.openxmlformats.org/drawingml/2006/main">
-            <a:off x="800100" y="2314575"/>
-            <a:ext cx="10334625" cy="1647825"/>
+            <a:off x="800100" y="2247900"/>
+            <a:ext cx="6953250" cy="2238375"/>
           </a:xfrm>
           <a:prstGeom xmlns:a="http://schemas.openxmlformats.org/drawingml/2006/main" prst="rect">
             <a:avLst/>
@@ -6365,7 +7069,8 @@
           <a:lstStyle xmlns:a="http://schemas.openxmlformats.org/drawingml/2006/main"/>
           <a:p xmlns:a="http://schemas.openxmlformats.org/drawingml/2006/main">
             <a:pPr>
-              <a:defRPr sz="2325" b="1">
+              <a:buNone/>
+              <a:defRPr sz="2100" b="1">
                 <a:solidFill>
                   <a:srgbClr val="18303F"/>
                 </a:solidFill>
@@ -6375,7 +7080,7 @@
               </a:defRPr>
             </a:pPr>
             <a:r>
-              <a:rPr sz="2325" b="1">
+              <a:rPr sz="2100" b="1">
                 <a:solidFill>
                   <a:srgbClr val="18303F"/>
                 </a:solidFill>
@@ -6388,7 +7093,8 @@
           </a:p>
           <a:p xmlns:a="http://schemas.openxmlformats.org/drawingml/2006/main">
             <a:pPr>
-              <a:defRPr sz="2325" b="1">
+              <a:buNone/>
+              <a:defRPr sz="2100" b="1">
                 <a:solidFill>
                   <a:srgbClr val="18303F"/>
                 </a:solidFill>
@@ -6398,7 +7104,7 @@
               </a:defRPr>
             </a:pPr>
             <a:r>
-              <a:rPr sz="2325" b="1">
+              <a:rPr sz="2100" b="1">
                 <a:solidFill>
                   <a:srgbClr val="18303F"/>
                 </a:solidFill>
@@ -6411,7 +7117,8 @@
           </a:p>
           <a:p xmlns:a="http://schemas.openxmlformats.org/drawingml/2006/main">
             <a:pPr>
-              <a:defRPr sz="2325" b="1">
+              <a:buNone/>
+              <a:defRPr sz="2100" b="1">
                 <a:solidFill>
                   <a:srgbClr val="18303F"/>
                 </a:solidFill>
@@ -6421,7 +7128,7 @@
               </a:defRPr>
             </a:pPr>
             <a:r>
-              <a:rPr sz="2325" b="1">
+              <a:rPr sz="2100" b="1">
                 <a:solidFill>
                   <a:srgbClr val="18303F"/>
                 </a:solidFill>
@@ -6468,6 +7175,7 @@
           <a:lstStyle xmlns:a="http://schemas.openxmlformats.org/drawingml/2006/main"/>
           <a:p xmlns:a="http://schemas.openxmlformats.org/drawingml/2006/main">
             <a:pPr>
+              <a:buNone/>
               <a:defRPr sz="2175" b="1">
                 <a:solidFill>
                   <a:srgbClr val="2F6079"/>
@@ -6525,6 +7233,7 @@
           <a:lstStyle xmlns:a="http://schemas.openxmlformats.org/drawingml/2006/main"/>
           <a:p xmlns:a="http://schemas.openxmlformats.org/drawingml/2006/main">
             <a:pPr>
+              <a:buNone/>
               <a:defRPr sz="1650" b="0">
                 <a:solidFill>
                   <a:srgbClr val="526571"/>
@@ -6544,6 +7253,85 @@
                 <a:cs typeface="Arial"/>
               </a:rPr>
               <a:t>Browser saving keeps a local copy. Export and verify a backup; follow your teacher’s submission instructions.</a:t>
+            </a:r>
+          </a:p>
+        </p:txBody>
+      </p:sp>
+      <p:pic>
+        <p:nvPicPr>
+          <p:cNvPr id="22" name=""/>
+          <p:cNvPicPr>
+            <a:picLocks xmlns:a="http://schemas.openxmlformats.org/drawingml/2006/main" noChangeAspect="1"/>
+          </p:cNvPicPr>
+          <p:nvPr/>
+        </p:nvPicPr>
+        <p:blipFill>
+          <a:blip xmlns:r="http://schemas.openxmlformats.org/officeDocument/2006/relationships" xmlns:a="http://schemas.openxmlformats.org/drawingml/2006/main" r:embed="Rbd0ae8807cef4f2b"/>
+          <a:stretch xmlns:a="http://schemas.openxmlformats.org/drawingml/2006/main"/>
+        </p:blipFill>
+        <p:spPr>
+          <a:xfrm xmlns:a="http://schemas.openxmlformats.org/drawingml/2006/main">
+            <a:off x="8286750" y="2197100"/>
+            <a:ext cx="3381375" cy="2254250"/>
+          </a:xfrm>
+          <a:prstGeom xmlns:a="http://schemas.openxmlformats.org/drawingml/2006/main" prst="rect">
+            <a:avLst/>
+          </a:prstGeom>
+        </p:spPr>
+      </p:pic>
+      <p:sp>
+        <p:nvSpPr>
+          <p:cNvPr id="12" name="">
+            <a:extLst xmlns:a="http://schemas.openxmlformats.org/drawingml/2006/main">
+              <a:ext uri="{FF2B5EF4-FFF2-40B4-BE49-F238E27FC236}">
+                <a16:creationId xmlns:a16="http://schemas.microsoft.com/office/drawing/2014/main" id="{E3FB5D7E-7F2E-41DC-95E8-C525004DA16E}"/>
+              </a:ext>
+            </a:extLst>
+          </p:cNvPr>
+          <p:cNvSpPr>
+            <a:spLocks xmlns:a="http://schemas.openxmlformats.org/drawingml/2006/main" noGrp="1"/>
+          </p:cNvSpPr>
+          <p:nvPr/>
+        </p:nvSpPr>
+        <p:spPr>
+          <a:xfrm xmlns:a="http://schemas.openxmlformats.org/drawingml/2006/main">
+            <a:off x="8286750" y="4543425"/>
+            <a:ext cx="3381375" cy="171450"/>
+          </a:xfrm>
+          <a:prstGeom xmlns:a="http://schemas.openxmlformats.org/drawingml/2006/main" prst="rect">
+            <a:avLst/>
+          </a:prstGeom>
+          <a:noFill xmlns:a="http://schemas.openxmlformats.org/drawingml/2006/main"/>
+          <a:ln xmlns:a="http://schemas.openxmlformats.org/drawingml/2006/main" w="0">
+            <a:noFill/>
+          </a:ln>
+        </p:spPr>
+        <p:txBody>
+          <a:bodyPr xmlns:a="http://schemas.openxmlformats.org/drawingml/2006/main">
+            <a:noAutofit/>
+          </a:bodyPr>
+          <a:lstStyle xmlns:a="http://schemas.openxmlformats.org/drawingml/2006/main"/>
+          <a:p xmlns:a="http://schemas.openxmlformats.org/drawingml/2006/main">
+            <a:pPr>
+              <a:defRPr sz="900">
+                <a:solidFill>
+                  <a:srgbClr val="526571"/>
+                </a:solidFill>
+                <a:latin typeface="Arial"/>
+                <a:ea typeface="Arial"/>
+                <a:cs typeface="Arial"/>
+              </a:defRPr>
+            </a:pPr>
+            <a:r>
+              <a:rPr sz="900">
+                <a:solidFill>
+                  <a:srgbClr val="526571"/>
+                </a:solidFill>
+                <a:latin typeface="Arial"/>
+                <a:ea typeface="Arial"/>
+                <a:cs typeface="Arial"/>
+              </a:rPr>
+              <a:t>AI-generated concept image</a:t>
             </a:r>
           </a:p>
         </p:txBody>
